--- a/14/Lecture14_Pandas_vs_Numpy.pptx
+++ b/14/Lecture14_Pandas_vs_Numpy.pptx
@@ -18479,8 +18479,8 @@
               <a:buNone/>
             </a:pPr>
             <a:r>
-              <a:rPr lang="en-GB" sz="3000" b="1" dirty="0"/>
-              <a:t>Lecture 13: </a:t>
+              <a:rPr lang="en-GB" sz="3000" b="1"/>
+              <a:t>Lecture 14: </a:t>
             </a:r>
             <a:endParaRPr sz="3000" b="1" dirty="0"/>
           </a:p>
